--- a/topic03-dataTypes-variables-and-expressions/unit-1/talk-2/b-local-vars.pptx
+++ b/topic03-dataTypes-variables-and-expressions/unit-1/talk-2/b-local-vars.pptx
@@ -492,14 +492,14 @@
           </a:ln>
           <a:extLst>
             <a:ext uri="{909E8E84-426E-40dd-AFC4-6F175D3DCCD1}">
-              <a14:hiddenFill xmlns="" xmlns:a14="http://schemas.microsoft.com/office/drawing/2010/main">
+              <a14:hiddenFill xmlns:a14="http://schemas.microsoft.com/office/drawing/2010/main" xmlns="">
                 <a:solidFill>
                   <a:srgbClr val="FFFFFF"/>
                 </a:solidFill>
               </a14:hiddenFill>
             </a:ext>
             <a:ext uri="{FAA26D3D-D897-4be2-8F04-BA451C77F1D7}">
-              <ma14:placeholderFlag xmlns="" xmlns:ma14="http://schemas.microsoft.com/office/mac/drawingml/2011/main" val="1"/>
+              <ma14:placeholderFlag xmlns:ma14="http://schemas.microsoft.com/office/mac/drawingml/2011/main" xmlns="" val="1"/>
             </a:ext>
           </a:extLst>
         </p:spPr>
@@ -843,14 +843,14 @@
           <a:noFill/>
           <a:extLst>
             <a:ext uri="{909E8E84-426E-40dd-AFC4-6F175D3DCCD1}">
-              <a14:hiddenFill xmlns="" xmlns:a14="http://schemas.microsoft.com/office/drawing/2010/main">
+              <a14:hiddenFill xmlns:a14="http://schemas.microsoft.com/office/drawing/2010/main" xmlns="">
                 <a:solidFill>
                   <a:srgbClr val="FFFFFF"/>
                 </a:solidFill>
               </a14:hiddenFill>
             </a:ext>
             <a:ext uri="{91240B29-F687-4f45-9708-019B960494DF}">
-              <a14:hiddenLine xmlns="" xmlns:a14="http://schemas.microsoft.com/office/drawing/2010/main" w="9525">
+              <a14:hiddenLine xmlns:a14="http://schemas.microsoft.com/office/drawing/2010/main" xmlns="" w="9525">
                 <a:solidFill>
                   <a:srgbClr val="000000"/>
                 </a:solidFill>
@@ -998,14 +998,14 @@
           <a:noFill/>
           <a:extLst>
             <a:ext uri="{909E8E84-426E-40dd-AFC4-6F175D3DCCD1}">
-              <a14:hiddenFill xmlns="" xmlns:a14="http://schemas.microsoft.com/office/drawing/2010/main">
+              <a14:hiddenFill xmlns:a14="http://schemas.microsoft.com/office/drawing/2010/main" xmlns="">
                 <a:solidFill>
                   <a:srgbClr val="FFFFFF"/>
                 </a:solidFill>
               </a14:hiddenFill>
             </a:ext>
             <a:ext uri="{91240B29-F687-4f45-9708-019B960494DF}">
-              <a14:hiddenLine xmlns="" xmlns:a14="http://schemas.microsoft.com/office/drawing/2010/main" w="9525">
+              <a14:hiddenLine xmlns:a14="http://schemas.microsoft.com/office/drawing/2010/main" xmlns="" w="9525">
                 <a:solidFill>
                   <a:srgbClr val="000000"/>
                 </a:solidFill>
@@ -1153,14 +1153,14 @@
           <a:noFill/>
           <a:extLst>
             <a:ext uri="{909E8E84-426E-40dd-AFC4-6F175D3DCCD1}">
-              <a14:hiddenFill xmlns="" xmlns:a14="http://schemas.microsoft.com/office/drawing/2010/main">
+              <a14:hiddenFill xmlns:a14="http://schemas.microsoft.com/office/drawing/2010/main" xmlns="">
                 <a:solidFill>
                   <a:srgbClr val="FFFFFF"/>
                 </a:solidFill>
               </a14:hiddenFill>
             </a:ext>
             <a:ext uri="{91240B29-F687-4f45-9708-019B960494DF}">
-              <a14:hiddenLine xmlns="" xmlns:a14="http://schemas.microsoft.com/office/drawing/2010/main" w="9525">
+              <a14:hiddenLine xmlns:a14="http://schemas.microsoft.com/office/drawing/2010/main" xmlns="" w="9525">
                 <a:solidFill>
                   <a:srgbClr val="000000"/>
                 </a:solidFill>
@@ -1332,7 +1332,7 @@
         <p:spPr>
           <a:extLst>
             <a:ext uri="{FAA26D3D-D897-4be2-8F04-BA451C77F1D7}">
-              <ma14:placeholderFlag xmlns="" xmlns:ma14="http://schemas.microsoft.com/office/mac/drawingml/2011/main" val="1"/>
+              <ma14:placeholderFlag xmlns:ma14="http://schemas.microsoft.com/office/mac/drawingml/2011/main" xmlns="" val="1"/>
             </a:ext>
           </a:extLst>
         </p:spPr>
@@ -1394,14 +1394,14 @@
           <a:noFill/>
           <a:extLst>
             <a:ext uri="{909E8E84-426E-40dd-AFC4-6F175D3DCCD1}">
-              <a14:hiddenFill xmlns="" xmlns:a14="http://schemas.microsoft.com/office/drawing/2010/main">
+              <a14:hiddenFill xmlns:a14="http://schemas.microsoft.com/office/drawing/2010/main" xmlns="">
                 <a:solidFill>
                   <a:srgbClr val="FFFFFF"/>
                 </a:solidFill>
               </a14:hiddenFill>
             </a:ext>
             <a:ext uri="{91240B29-F687-4f45-9708-019B960494DF}">
-              <a14:hiddenLine xmlns="" xmlns:a14="http://schemas.microsoft.com/office/drawing/2010/main" w="9525">
+              <a14:hiddenLine xmlns:a14="http://schemas.microsoft.com/office/drawing/2010/main" xmlns="" w="9525">
                 <a:solidFill>
                   <a:srgbClr val="000000"/>
                 </a:solidFill>
@@ -1549,14 +1549,14 @@
           <a:noFill/>
           <a:extLst>
             <a:ext uri="{909E8E84-426E-40dd-AFC4-6F175D3DCCD1}">
-              <a14:hiddenFill xmlns="" xmlns:a14="http://schemas.microsoft.com/office/drawing/2010/main">
+              <a14:hiddenFill xmlns:a14="http://schemas.microsoft.com/office/drawing/2010/main" xmlns="">
                 <a:solidFill>
                   <a:srgbClr val="FFFFFF"/>
                 </a:solidFill>
               </a14:hiddenFill>
             </a:ext>
             <a:ext uri="{91240B29-F687-4f45-9708-019B960494DF}">
-              <a14:hiddenLine xmlns="" xmlns:a14="http://schemas.microsoft.com/office/drawing/2010/main" w="9525">
+              <a14:hiddenLine xmlns:a14="http://schemas.microsoft.com/office/drawing/2010/main" xmlns="" w="9525">
                 <a:solidFill>
                   <a:srgbClr val="000000"/>
                 </a:solidFill>
@@ -1704,14 +1704,14 @@
           <a:noFill/>
           <a:extLst>
             <a:ext uri="{909E8E84-426E-40dd-AFC4-6F175D3DCCD1}">
-              <a14:hiddenFill xmlns="" xmlns:a14="http://schemas.microsoft.com/office/drawing/2010/main">
+              <a14:hiddenFill xmlns:a14="http://schemas.microsoft.com/office/drawing/2010/main" xmlns="">
                 <a:solidFill>
                   <a:srgbClr val="FFFFFF"/>
                 </a:solidFill>
               </a14:hiddenFill>
             </a:ext>
             <a:ext uri="{91240B29-F687-4f45-9708-019B960494DF}">
-              <a14:hiddenLine xmlns="" xmlns:a14="http://schemas.microsoft.com/office/drawing/2010/main" w="9525">
+              <a14:hiddenLine xmlns:a14="http://schemas.microsoft.com/office/drawing/2010/main" xmlns="" w="9525">
                 <a:solidFill>
                   <a:srgbClr val="000000"/>
                 </a:solidFill>
@@ -1891,14 +1891,14 @@
           <a:noFill/>
           <a:extLst>
             <a:ext uri="{909E8E84-426E-40dd-AFC4-6F175D3DCCD1}">
-              <a14:hiddenFill xmlns="" xmlns:a14="http://schemas.microsoft.com/office/drawing/2010/main">
+              <a14:hiddenFill xmlns:a14="http://schemas.microsoft.com/office/drawing/2010/main" xmlns="">
                 <a:solidFill>
                   <a:srgbClr val="FFFFFF"/>
                 </a:solidFill>
               </a14:hiddenFill>
             </a:ext>
             <a:ext uri="{91240B29-F687-4f45-9708-019B960494DF}">
-              <a14:hiddenLine xmlns="" xmlns:a14="http://schemas.microsoft.com/office/drawing/2010/main" w="9525">
+              <a14:hiddenLine xmlns:a14="http://schemas.microsoft.com/office/drawing/2010/main" xmlns="" w="9525">
                 <a:solidFill>
                   <a:srgbClr val="000000"/>
                 </a:solidFill>
@@ -1908,7 +1908,7 @@
               </a14:hiddenLine>
             </a:ext>
             <a:ext uri="{AF507438-7753-43e0-B8FC-AC1667EBCBE1}">
-              <a14:hiddenEffects xmlns="" xmlns:a14="http://schemas.microsoft.com/office/drawing/2010/main">
+              <a14:hiddenEffects xmlns:a14="http://schemas.microsoft.com/office/drawing/2010/main" xmlns="">
                 <a:effectLst>
                   <a:outerShdw dist="35921" dir="2700000" algn="ctr" rotWithShape="0">
                     <a:srgbClr val="808080"/>
@@ -1917,7 +1917,7 @@
               </a14:hiddenEffects>
             </a:ext>
             <a:ext uri="{53640926-AAD7-44d8-BBD7-CCE9431645EC}">
-              <a14:shadowObscured xmlns="" xmlns:a14="http://schemas.microsoft.com/office/drawing/2010/main" val="1"/>
+              <a14:shadowObscured xmlns:a14="http://schemas.microsoft.com/office/drawing/2010/main" xmlns="" val="1"/>
             </a:ext>
           </a:extLst>
         </p:spPr>
@@ -1990,14 +1990,14 @@
           <a:noFill/>
           <a:extLst>
             <a:ext uri="{909E8E84-426E-40dd-AFC4-6F175D3DCCD1}">
-              <a14:hiddenFill xmlns="" xmlns:a14="http://schemas.microsoft.com/office/drawing/2010/main">
+              <a14:hiddenFill xmlns:a14="http://schemas.microsoft.com/office/drawing/2010/main" xmlns="">
                 <a:solidFill>
                   <a:srgbClr val="FFFFFF"/>
                 </a:solidFill>
               </a14:hiddenFill>
             </a:ext>
             <a:ext uri="{91240B29-F687-4f45-9708-019B960494DF}">
-              <a14:hiddenLine xmlns="" xmlns:a14="http://schemas.microsoft.com/office/drawing/2010/main" w="9525">
+              <a14:hiddenLine xmlns:a14="http://schemas.microsoft.com/office/drawing/2010/main" xmlns="" w="9525">
                 <a:solidFill>
                   <a:srgbClr val="000000"/>
                 </a:solidFill>
@@ -2145,14 +2145,14 @@
           <a:noFill/>
           <a:extLst>
             <a:ext uri="{909E8E84-426E-40dd-AFC4-6F175D3DCCD1}">
-              <a14:hiddenFill xmlns="" xmlns:a14="http://schemas.microsoft.com/office/drawing/2010/main">
+              <a14:hiddenFill xmlns:a14="http://schemas.microsoft.com/office/drawing/2010/main" xmlns="">
                 <a:solidFill>
                   <a:srgbClr val="FFFFFF"/>
                 </a:solidFill>
               </a14:hiddenFill>
             </a:ext>
             <a:ext uri="{91240B29-F687-4f45-9708-019B960494DF}">
-              <a14:hiddenLine xmlns="" xmlns:a14="http://schemas.microsoft.com/office/drawing/2010/main" w="9525">
+              <a14:hiddenLine xmlns:a14="http://schemas.microsoft.com/office/drawing/2010/main" xmlns="" w="9525">
                 <a:solidFill>
                   <a:srgbClr val="000000"/>
                 </a:solidFill>
@@ -2300,14 +2300,14 @@
           <a:noFill/>
           <a:extLst>
             <a:ext uri="{909E8E84-426E-40dd-AFC4-6F175D3DCCD1}">
-              <a14:hiddenFill xmlns="" xmlns:a14="http://schemas.microsoft.com/office/drawing/2010/main">
+              <a14:hiddenFill xmlns:a14="http://schemas.microsoft.com/office/drawing/2010/main" xmlns="">
                 <a:solidFill>
                   <a:srgbClr val="FFFFFF"/>
                 </a:solidFill>
               </a14:hiddenFill>
             </a:ext>
             <a:ext uri="{91240B29-F687-4f45-9708-019B960494DF}">
-              <a14:hiddenLine xmlns="" xmlns:a14="http://schemas.microsoft.com/office/drawing/2010/main" w="9525">
+              <a14:hiddenLine xmlns:a14="http://schemas.microsoft.com/office/drawing/2010/main" xmlns="" w="9525">
                 <a:solidFill>
                   <a:srgbClr val="000000"/>
                 </a:solidFill>
@@ -2479,7 +2479,7 @@
         <p:spPr>
           <a:extLst>
             <a:ext uri="{FAA26D3D-D897-4be2-8F04-BA451C77F1D7}">
-              <ma14:placeholderFlag xmlns="" xmlns:ma14="http://schemas.microsoft.com/office/mac/drawingml/2011/main" val="1"/>
+              <ma14:placeholderFlag xmlns:ma14="http://schemas.microsoft.com/office/mac/drawingml/2011/main" xmlns="" val="1"/>
             </a:ext>
           </a:extLst>
         </p:spPr>
@@ -2681,14 +2681,14 @@
           <a:noFill/>
           <a:extLst>
             <a:ext uri="{909E8E84-426E-40dd-AFC4-6F175D3DCCD1}">
-              <a14:hiddenFill xmlns="" xmlns:a14="http://schemas.microsoft.com/office/drawing/2010/main">
+              <a14:hiddenFill xmlns:a14="http://schemas.microsoft.com/office/drawing/2010/main" xmlns="">
                 <a:solidFill>
                   <a:srgbClr val="FFFFFF"/>
                 </a:solidFill>
               </a14:hiddenFill>
             </a:ext>
             <a:ext uri="{91240B29-F687-4f45-9708-019B960494DF}">
-              <a14:hiddenLine xmlns="" xmlns:a14="http://schemas.microsoft.com/office/drawing/2010/main" w="9525">
+              <a14:hiddenLine xmlns:a14="http://schemas.microsoft.com/office/drawing/2010/main" xmlns="" w="9525">
                 <a:solidFill>
                   <a:srgbClr val="000000"/>
                 </a:solidFill>
@@ -2836,14 +2836,14 @@
           <a:noFill/>
           <a:extLst>
             <a:ext uri="{909E8E84-426E-40dd-AFC4-6F175D3DCCD1}">
-              <a14:hiddenFill xmlns="" xmlns:a14="http://schemas.microsoft.com/office/drawing/2010/main">
+              <a14:hiddenFill xmlns:a14="http://schemas.microsoft.com/office/drawing/2010/main" xmlns="">
                 <a:solidFill>
                   <a:srgbClr val="FFFFFF"/>
                 </a:solidFill>
               </a14:hiddenFill>
             </a:ext>
             <a:ext uri="{91240B29-F687-4f45-9708-019B960494DF}">
-              <a14:hiddenLine xmlns="" xmlns:a14="http://schemas.microsoft.com/office/drawing/2010/main" w="9525">
+              <a14:hiddenLine xmlns:a14="http://schemas.microsoft.com/office/drawing/2010/main" xmlns="" w="9525">
                 <a:solidFill>
                   <a:srgbClr val="000000"/>
                 </a:solidFill>
@@ -2991,14 +2991,14 @@
           <a:noFill/>
           <a:extLst>
             <a:ext uri="{909E8E84-426E-40dd-AFC4-6F175D3DCCD1}">
-              <a14:hiddenFill xmlns="" xmlns:a14="http://schemas.microsoft.com/office/drawing/2010/main">
+              <a14:hiddenFill xmlns:a14="http://schemas.microsoft.com/office/drawing/2010/main" xmlns="">
                 <a:solidFill>
                   <a:srgbClr val="FFFFFF"/>
                 </a:solidFill>
               </a14:hiddenFill>
             </a:ext>
             <a:ext uri="{91240B29-F687-4f45-9708-019B960494DF}">
-              <a14:hiddenLine xmlns="" xmlns:a14="http://schemas.microsoft.com/office/drawing/2010/main" w="9525">
+              <a14:hiddenLine xmlns:a14="http://schemas.microsoft.com/office/drawing/2010/main" xmlns="" w="9525">
                 <a:solidFill>
                   <a:srgbClr val="000000"/>
                 </a:solidFill>
@@ -3184,7 +3184,7 @@
           </a:ln>
           <a:extLst>
             <a:ext uri="{FAA26D3D-D897-4be2-8F04-BA451C77F1D7}">
-              <ma14:placeholderFlag xmlns="" xmlns:ma14="http://schemas.microsoft.com/office/mac/drawingml/2011/main" val="1"/>
+              <ma14:placeholderFlag xmlns:ma14="http://schemas.microsoft.com/office/mac/drawingml/2011/main" xmlns="" val="1"/>
             </a:ext>
           </a:extLst>
         </p:spPr>
@@ -3396,7 +3396,7 @@
           <a:p>
             <a:fld id="{C764DE79-268F-4C1A-8933-263129D2AF90}" type="datetimeFigureOut">
               <a:rPr lang="en-US" smtClean="0"/>
-              <a:t>9/28/25</a:t>
+              <a:t>10/6/2025</a:t>
             </a:fld>
             <a:endParaRPr lang="en-US" dirty="0"/>
           </a:p>
@@ -3567,7 +3567,7 @@
           <a:p>
             <a:fld id="{C764DE79-268F-4C1A-8933-263129D2AF90}" type="datetimeFigureOut">
               <a:rPr lang="en-US" smtClean="0"/>
-              <a:t>9/28/25</a:t>
+              <a:t>10/6/2025</a:t>
             </a:fld>
             <a:endParaRPr lang="en-US" dirty="0"/>
           </a:p>
@@ -3748,7 +3748,7 @@
           <a:p>
             <a:fld id="{C764DE79-268F-4C1A-8933-263129D2AF90}" type="datetimeFigureOut">
               <a:rPr lang="en-US" smtClean="0"/>
-              <a:t>9/28/25</a:t>
+              <a:t>10/6/2025</a:t>
             </a:fld>
             <a:endParaRPr lang="en-US" dirty="0"/>
           </a:p>
@@ -4479,7 +4479,7 @@
           <a:p>
             <a:fld id="{C764DE79-268F-4C1A-8933-263129D2AF90}" type="datetimeFigureOut">
               <a:rPr lang="en-US" smtClean="0"/>
-              <a:t>9/28/25</a:t>
+              <a:t>10/6/2025</a:t>
             </a:fld>
             <a:endParaRPr lang="en-US" dirty="0"/>
           </a:p>
@@ -4851,7 +4851,7 @@
           <a:p>
             <a:fld id="{C764DE79-268F-4C1A-8933-263129D2AF90}" type="datetimeFigureOut">
               <a:rPr lang="en-US" smtClean="0"/>
-              <a:t>9/28/25</a:t>
+              <a:t>10/6/2025</a:t>
             </a:fld>
             <a:endParaRPr lang="en-US" dirty="0"/>
           </a:p>
@@ -5151,7 +5151,7 @@
           <a:p>
             <a:fld id="{C764DE79-268F-4C1A-8933-263129D2AF90}" type="datetimeFigureOut">
               <a:rPr lang="en-US" smtClean="0"/>
-              <a:t>9/28/25</a:t>
+              <a:t>10/6/2025</a:t>
             </a:fld>
             <a:endParaRPr lang="en-US" dirty="0"/>
           </a:p>
@@ -5698,7 +5698,7 @@
           <a:p>
             <a:fld id="{C764DE79-268F-4C1A-8933-263129D2AF90}" type="datetimeFigureOut">
               <a:rPr lang="en-US" smtClean="0"/>
-              <a:t>9/28/25</a:t>
+              <a:t>10/6/2025</a:t>
             </a:fld>
             <a:endParaRPr lang="en-US" dirty="0"/>
           </a:p>
@@ -5904,7 +5904,7 @@
           <a:p>
             <a:fld id="{C764DE79-268F-4C1A-8933-263129D2AF90}" type="datetimeFigureOut">
               <a:rPr lang="en-US" smtClean="0"/>
-              <a:t>9/28/25</a:t>
+              <a:t>10/6/2025</a:t>
             </a:fld>
             <a:endParaRPr lang="en-US" dirty="0"/>
           </a:p>
@@ -6116,7 +6116,7 @@
           <a:p>
             <a:fld id="{C764DE79-268F-4C1A-8933-263129D2AF90}" type="datetimeFigureOut">
               <a:rPr lang="en-US" smtClean="0"/>
-              <a:t>9/28/25</a:t>
+              <a:t>10/6/2025</a:t>
             </a:fld>
             <a:endParaRPr lang="en-US" dirty="0"/>
           </a:p>
@@ -6393,7 +6393,7 @@
           <a:p>
             <a:fld id="{C764DE79-268F-4C1A-8933-263129D2AF90}" type="datetimeFigureOut">
               <a:rPr lang="en-US" smtClean="0"/>
-              <a:t>9/28/25</a:t>
+              <a:t>10/6/2025</a:t>
             </a:fld>
             <a:endParaRPr lang="en-US" dirty="0"/>
           </a:p>
@@ -6651,7 +6651,7 @@
           <a:p>
             <a:fld id="{C764DE79-268F-4C1A-8933-263129D2AF90}" type="datetimeFigureOut">
               <a:rPr lang="en-US" smtClean="0"/>
-              <a:t>9/28/25</a:t>
+              <a:t>10/6/2025</a:t>
             </a:fld>
             <a:endParaRPr lang="en-US" dirty="0"/>
           </a:p>
@@ -6870,7 +6870,7 @@
           <a:p>
             <a:fld id="{C764DE79-268F-4C1A-8933-263129D2AF90}" type="datetimeFigureOut">
               <a:rPr lang="en-US" smtClean="0"/>
-              <a:t>9/28/25</a:t>
+              <a:t>10/6/2025</a:t>
             </a:fld>
             <a:endParaRPr lang="en-US" dirty="0"/>
           </a:p>
@@ -7339,14 +7339,14 @@
           </a:ln>
           <a:extLst>
             <a:ext uri="{909E8E84-426E-40dd-AFC4-6F175D3DCCD1}">
-              <a14:hiddenFill xmlns="" xmlns:a14="http://schemas.microsoft.com/office/drawing/2010/main">
+              <a14:hiddenFill xmlns:a14="http://schemas.microsoft.com/office/drawing/2010/main" xmlns="">
                 <a:solidFill>
                   <a:srgbClr val="FFFFFF"/>
                 </a:solidFill>
               </a14:hiddenFill>
             </a:ext>
             <a:ext uri="{91240B29-F687-4f45-9708-019B960494DF}">
-              <a14:hiddenLine xmlns="" xmlns:a14="http://schemas.microsoft.com/office/drawing/2010/main" w="9525">
+              <a14:hiddenLine xmlns:a14="http://schemas.microsoft.com/office/drawing/2010/main" xmlns="" w="9525">
                 <a:solidFill>
                   <a:srgbClr val="000000"/>
                 </a:solidFill>
@@ -9709,14 +9709,14 @@
           </a:ln>
           <a:extLst>
             <a:ext uri="{909E8E84-426E-40dd-AFC4-6F175D3DCCD1}">
-              <a14:hiddenFill xmlns="" xmlns:a14="http://schemas.microsoft.com/office/drawing/2010/main">
+              <a14:hiddenFill xmlns:a14="http://schemas.microsoft.com/office/drawing/2010/main" xmlns="">
                 <a:solidFill>
                   <a:srgbClr val="FFFFFF"/>
                 </a:solidFill>
               </a14:hiddenFill>
             </a:ext>
             <a:ext uri="{91240B29-F687-4f45-9708-019B960494DF}">
-              <a14:hiddenLine xmlns="" xmlns:a14="http://schemas.microsoft.com/office/drawing/2010/main" w="9525">
+              <a14:hiddenLine xmlns:a14="http://schemas.microsoft.com/office/drawing/2010/main" xmlns="" w="9525">
                 <a:solidFill>
                   <a:srgbClr val="000000"/>
                 </a:solidFill>
@@ -10541,14 +10541,14 @@
           </a:ln>
           <a:extLst>
             <a:ext uri="{909E8E84-426E-40dd-AFC4-6F175D3DCCD1}">
-              <a14:hiddenFill xmlns="" xmlns:a14="http://schemas.microsoft.com/office/drawing/2010/main">
+              <a14:hiddenFill xmlns:a14="http://schemas.microsoft.com/office/drawing/2010/main" xmlns="">
                 <a:solidFill>
                   <a:srgbClr val="FFFFFF"/>
                 </a:solidFill>
               </a14:hiddenFill>
             </a:ext>
             <a:ext uri="{91240B29-F687-4f45-9708-019B960494DF}">
-              <a14:hiddenLine xmlns="" xmlns:a14="http://schemas.microsoft.com/office/drawing/2010/main" w="9525">
+              <a14:hiddenLine xmlns:a14="http://schemas.microsoft.com/office/drawing/2010/main" xmlns="" w="9525">
                 <a:solidFill>
                   <a:srgbClr val="000000"/>
                 </a:solidFill>
@@ -10969,14 +10969,14 @@
           </a:ln>
           <a:extLst>
             <a:ext uri="{909E8E84-426E-40dd-AFC4-6F175D3DCCD1}">
-              <a14:hiddenFill xmlns="" xmlns:a14="http://schemas.microsoft.com/office/drawing/2010/main">
+              <a14:hiddenFill xmlns:a14="http://schemas.microsoft.com/office/drawing/2010/main" xmlns="">
                 <a:solidFill>
                   <a:srgbClr val="FFFFFF"/>
                 </a:solidFill>
               </a14:hiddenFill>
             </a:ext>
             <a:ext uri="{91240B29-F687-4f45-9708-019B960494DF}">
-              <a14:hiddenLine xmlns="" xmlns:a14="http://schemas.microsoft.com/office/drawing/2010/main" w="9525">
+              <a14:hiddenLine xmlns:a14="http://schemas.microsoft.com/office/drawing/2010/main" xmlns="" w="9525">
                 <a:solidFill>
                   <a:srgbClr val="000000"/>
                 </a:solidFill>
@@ -11334,14 +11334,14 @@
           </a:ln>
           <a:extLst>
             <a:ext uri="{909E8E84-426E-40dd-AFC4-6F175D3DCCD1}">
-              <a14:hiddenFill xmlns="" xmlns:a14="http://schemas.microsoft.com/office/drawing/2010/main">
+              <a14:hiddenFill xmlns:a14="http://schemas.microsoft.com/office/drawing/2010/main" xmlns="">
                 <a:solidFill>
                   <a:srgbClr val="FFFFFF"/>
                 </a:solidFill>
               </a14:hiddenFill>
             </a:ext>
             <a:ext uri="{91240B29-F687-4f45-9708-019B960494DF}">
-              <a14:hiddenLine xmlns="" xmlns:a14="http://schemas.microsoft.com/office/drawing/2010/main" w="9525">
+              <a14:hiddenLine xmlns:a14="http://schemas.microsoft.com/office/drawing/2010/main" xmlns="" w="9525">
                 <a:solidFill>
                   <a:srgbClr val="000000"/>
                 </a:solidFill>
@@ -11582,7 +11582,7 @@
           </a:ln>
           <a:extLst>
             <a:ext uri="{909E8E84-426E-40dd-AFC4-6F175D3DCCD1}">
-              <a14:hiddenFill xmlns="" xmlns:a14="http://schemas.microsoft.com/office/drawing/2010/main">
+              <a14:hiddenFill xmlns:a14="http://schemas.microsoft.com/office/drawing/2010/main" xmlns="">
                 <a:noFill/>
               </a14:hiddenFill>
             </a:ext>

--- a/topic03-dataTypes-variables-and-expressions/unit-1/talk-2/b-local-vars.pptx
+++ b/topic03-dataTypes-variables-and-expressions/unit-1/talk-2/b-local-vars.pptx
@@ -492,14 +492,14 @@
           </a:ln>
           <a:extLst>
             <a:ext uri="{909E8E84-426E-40dd-AFC4-6F175D3DCCD1}">
-              <a14:hiddenFill xmlns:a14="http://schemas.microsoft.com/office/drawing/2010/main" xmlns="">
+              <a14:hiddenFill xmlns="" xmlns:a14="http://schemas.microsoft.com/office/drawing/2010/main">
                 <a:solidFill>
                   <a:srgbClr val="FFFFFF"/>
                 </a:solidFill>
               </a14:hiddenFill>
             </a:ext>
             <a:ext uri="{FAA26D3D-D897-4be2-8F04-BA451C77F1D7}">
-              <ma14:placeholderFlag xmlns:ma14="http://schemas.microsoft.com/office/mac/drawingml/2011/main" xmlns="" val="1"/>
+              <ma14:placeholderFlag xmlns="" xmlns:ma14="http://schemas.microsoft.com/office/mac/drawingml/2011/main" val="1"/>
             </a:ext>
           </a:extLst>
         </p:spPr>
@@ -843,14 +843,14 @@
           <a:noFill/>
           <a:extLst>
             <a:ext uri="{909E8E84-426E-40dd-AFC4-6F175D3DCCD1}">
-              <a14:hiddenFill xmlns:a14="http://schemas.microsoft.com/office/drawing/2010/main" xmlns="">
+              <a14:hiddenFill xmlns="" xmlns:a14="http://schemas.microsoft.com/office/drawing/2010/main">
                 <a:solidFill>
                   <a:srgbClr val="FFFFFF"/>
                 </a:solidFill>
               </a14:hiddenFill>
             </a:ext>
             <a:ext uri="{91240B29-F687-4f45-9708-019B960494DF}">
-              <a14:hiddenLine xmlns:a14="http://schemas.microsoft.com/office/drawing/2010/main" xmlns="" w="9525">
+              <a14:hiddenLine xmlns="" xmlns:a14="http://schemas.microsoft.com/office/drawing/2010/main" w="9525">
                 <a:solidFill>
                   <a:srgbClr val="000000"/>
                 </a:solidFill>
@@ -998,14 +998,14 @@
           <a:noFill/>
           <a:extLst>
             <a:ext uri="{909E8E84-426E-40dd-AFC4-6F175D3DCCD1}">
-              <a14:hiddenFill xmlns:a14="http://schemas.microsoft.com/office/drawing/2010/main" xmlns="">
+              <a14:hiddenFill xmlns="" xmlns:a14="http://schemas.microsoft.com/office/drawing/2010/main">
                 <a:solidFill>
                   <a:srgbClr val="FFFFFF"/>
                 </a:solidFill>
               </a14:hiddenFill>
             </a:ext>
             <a:ext uri="{91240B29-F687-4f45-9708-019B960494DF}">
-              <a14:hiddenLine xmlns:a14="http://schemas.microsoft.com/office/drawing/2010/main" xmlns="" w="9525">
+              <a14:hiddenLine xmlns="" xmlns:a14="http://schemas.microsoft.com/office/drawing/2010/main" w="9525">
                 <a:solidFill>
                   <a:srgbClr val="000000"/>
                 </a:solidFill>
@@ -1153,14 +1153,14 @@
           <a:noFill/>
           <a:extLst>
             <a:ext uri="{909E8E84-426E-40dd-AFC4-6F175D3DCCD1}">
-              <a14:hiddenFill xmlns:a14="http://schemas.microsoft.com/office/drawing/2010/main" xmlns="">
+              <a14:hiddenFill xmlns="" xmlns:a14="http://schemas.microsoft.com/office/drawing/2010/main">
                 <a:solidFill>
                   <a:srgbClr val="FFFFFF"/>
                 </a:solidFill>
               </a14:hiddenFill>
             </a:ext>
             <a:ext uri="{91240B29-F687-4f45-9708-019B960494DF}">
-              <a14:hiddenLine xmlns:a14="http://schemas.microsoft.com/office/drawing/2010/main" xmlns="" w="9525">
+              <a14:hiddenLine xmlns="" xmlns:a14="http://schemas.microsoft.com/office/drawing/2010/main" w="9525">
                 <a:solidFill>
                   <a:srgbClr val="000000"/>
                 </a:solidFill>
@@ -1332,7 +1332,7 @@
         <p:spPr>
           <a:extLst>
             <a:ext uri="{FAA26D3D-D897-4be2-8F04-BA451C77F1D7}">
-              <ma14:placeholderFlag xmlns:ma14="http://schemas.microsoft.com/office/mac/drawingml/2011/main" xmlns="" val="1"/>
+              <ma14:placeholderFlag xmlns="" xmlns:ma14="http://schemas.microsoft.com/office/mac/drawingml/2011/main" val="1"/>
             </a:ext>
           </a:extLst>
         </p:spPr>
@@ -1394,14 +1394,14 @@
           <a:noFill/>
           <a:extLst>
             <a:ext uri="{909E8E84-426E-40dd-AFC4-6F175D3DCCD1}">
-              <a14:hiddenFill xmlns:a14="http://schemas.microsoft.com/office/drawing/2010/main" xmlns="">
+              <a14:hiddenFill xmlns="" xmlns:a14="http://schemas.microsoft.com/office/drawing/2010/main">
                 <a:solidFill>
                   <a:srgbClr val="FFFFFF"/>
                 </a:solidFill>
               </a14:hiddenFill>
             </a:ext>
             <a:ext uri="{91240B29-F687-4f45-9708-019B960494DF}">
-              <a14:hiddenLine xmlns:a14="http://schemas.microsoft.com/office/drawing/2010/main" xmlns="" w="9525">
+              <a14:hiddenLine xmlns="" xmlns:a14="http://schemas.microsoft.com/office/drawing/2010/main" w="9525">
                 <a:solidFill>
                   <a:srgbClr val="000000"/>
                 </a:solidFill>
@@ -1549,14 +1549,14 @@
           <a:noFill/>
           <a:extLst>
             <a:ext uri="{909E8E84-426E-40dd-AFC4-6F175D3DCCD1}">
-              <a14:hiddenFill xmlns:a14="http://schemas.microsoft.com/office/drawing/2010/main" xmlns="">
+              <a14:hiddenFill xmlns="" xmlns:a14="http://schemas.microsoft.com/office/drawing/2010/main">
                 <a:solidFill>
                   <a:srgbClr val="FFFFFF"/>
                 </a:solidFill>
               </a14:hiddenFill>
             </a:ext>
             <a:ext uri="{91240B29-F687-4f45-9708-019B960494DF}">
-              <a14:hiddenLine xmlns:a14="http://schemas.microsoft.com/office/drawing/2010/main" xmlns="" w="9525">
+              <a14:hiddenLine xmlns="" xmlns:a14="http://schemas.microsoft.com/office/drawing/2010/main" w="9525">
                 <a:solidFill>
                   <a:srgbClr val="000000"/>
                 </a:solidFill>
@@ -1704,14 +1704,14 @@
           <a:noFill/>
           <a:extLst>
             <a:ext uri="{909E8E84-426E-40dd-AFC4-6F175D3DCCD1}">
-              <a14:hiddenFill xmlns:a14="http://schemas.microsoft.com/office/drawing/2010/main" xmlns="">
+              <a14:hiddenFill xmlns="" xmlns:a14="http://schemas.microsoft.com/office/drawing/2010/main">
                 <a:solidFill>
                   <a:srgbClr val="FFFFFF"/>
                 </a:solidFill>
               </a14:hiddenFill>
             </a:ext>
             <a:ext uri="{91240B29-F687-4f45-9708-019B960494DF}">
-              <a14:hiddenLine xmlns:a14="http://schemas.microsoft.com/office/drawing/2010/main" xmlns="" w="9525">
+              <a14:hiddenLine xmlns="" xmlns:a14="http://schemas.microsoft.com/office/drawing/2010/main" w="9525">
                 <a:solidFill>
                   <a:srgbClr val="000000"/>
                 </a:solidFill>
@@ -1891,14 +1891,14 @@
           <a:noFill/>
           <a:extLst>
             <a:ext uri="{909E8E84-426E-40dd-AFC4-6F175D3DCCD1}">
-              <a14:hiddenFill xmlns:a14="http://schemas.microsoft.com/office/drawing/2010/main" xmlns="">
+              <a14:hiddenFill xmlns="" xmlns:a14="http://schemas.microsoft.com/office/drawing/2010/main">
                 <a:solidFill>
                   <a:srgbClr val="FFFFFF"/>
                 </a:solidFill>
               </a14:hiddenFill>
             </a:ext>
             <a:ext uri="{91240B29-F687-4f45-9708-019B960494DF}">
-              <a14:hiddenLine xmlns:a14="http://schemas.microsoft.com/office/drawing/2010/main" xmlns="" w="9525">
+              <a14:hiddenLine xmlns="" xmlns:a14="http://schemas.microsoft.com/office/drawing/2010/main" w="9525">
                 <a:solidFill>
                   <a:srgbClr val="000000"/>
                 </a:solidFill>
@@ -1908,7 +1908,7 @@
               </a14:hiddenLine>
             </a:ext>
             <a:ext uri="{AF507438-7753-43e0-B8FC-AC1667EBCBE1}">
-              <a14:hiddenEffects xmlns:a14="http://schemas.microsoft.com/office/drawing/2010/main" xmlns="">
+              <a14:hiddenEffects xmlns="" xmlns:a14="http://schemas.microsoft.com/office/drawing/2010/main">
                 <a:effectLst>
                   <a:outerShdw dist="35921" dir="2700000" algn="ctr" rotWithShape="0">
                     <a:srgbClr val="808080"/>
@@ -1917,7 +1917,7 @@
               </a14:hiddenEffects>
             </a:ext>
             <a:ext uri="{53640926-AAD7-44d8-BBD7-CCE9431645EC}">
-              <a14:shadowObscured xmlns:a14="http://schemas.microsoft.com/office/drawing/2010/main" xmlns="" val="1"/>
+              <a14:shadowObscured xmlns="" xmlns:a14="http://schemas.microsoft.com/office/drawing/2010/main" val="1"/>
             </a:ext>
           </a:extLst>
         </p:spPr>
@@ -1990,14 +1990,14 @@
           <a:noFill/>
           <a:extLst>
             <a:ext uri="{909E8E84-426E-40dd-AFC4-6F175D3DCCD1}">
-              <a14:hiddenFill xmlns:a14="http://schemas.microsoft.com/office/drawing/2010/main" xmlns="">
+              <a14:hiddenFill xmlns="" xmlns:a14="http://schemas.microsoft.com/office/drawing/2010/main">
                 <a:solidFill>
                   <a:srgbClr val="FFFFFF"/>
                 </a:solidFill>
               </a14:hiddenFill>
             </a:ext>
             <a:ext uri="{91240B29-F687-4f45-9708-019B960494DF}">
-              <a14:hiddenLine xmlns:a14="http://schemas.microsoft.com/office/drawing/2010/main" xmlns="" w="9525">
+              <a14:hiddenLine xmlns="" xmlns:a14="http://schemas.microsoft.com/office/drawing/2010/main" w="9525">
                 <a:solidFill>
                   <a:srgbClr val="000000"/>
                 </a:solidFill>
@@ -2145,14 +2145,14 @@
           <a:noFill/>
           <a:extLst>
             <a:ext uri="{909E8E84-426E-40dd-AFC4-6F175D3DCCD1}">
-              <a14:hiddenFill xmlns:a14="http://schemas.microsoft.com/office/drawing/2010/main" xmlns="">
+              <a14:hiddenFill xmlns="" xmlns:a14="http://schemas.microsoft.com/office/drawing/2010/main">
                 <a:solidFill>
                   <a:srgbClr val="FFFFFF"/>
                 </a:solidFill>
               </a14:hiddenFill>
             </a:ext>
             <a:ext uri="{91240B29-F687-4f45-9708-019B960494DF}">
-              <a14:hiddenLine xmlns:a14="http://schemas.microsoft.com/office/drawing/2010/main" xmlns="" w="9525">
+              <a14:hiddenLine xmlns="" xmlns:a14="http://schemas.microsoft.com/office/drawing/2010/main" w="9525">
                 <a:solidFill>
                   <a:srgbClr val="000000"/>
                 </a:solidFill>
@@ -2300,14 +2300,14 @@
           <a:noFill/>
           <a:extLst>
             <a:ext uri="{909E8E84-426E-40dd-AFC4-6F175D3DCCD1}">
-              <a14:hiddenFill xmlns:a14="http://schemas.microsoft.com/office/drawing/2010/main" xmlns="">
+              <a14:hiddenFill xmlns="" xmlns:a14="http://schemas.microsoft.com/office/drawing/2010/main">
                 <a:solidFill>
                   <a:srgbClr val="FFFFFF"/>
                 </a:solidFill>
               </a14:hiddenFill>
             </a:ext>
             <a:ext uri="{91240B29-F687-4f45-9708-019B960494DF}">
-              <a14:hiddenLine xmlns:a14="http://schemas.microsoft.com/office/drawing/2010/main" xmlns="" w="9525">
+              <a14:hiddenLine xmlns="" xmlns:a14="http://schemas.microsoft.com/office/drawing/2010/main" w="9525">
                 <a:solidFill>
                   <a:srgbClr val="000000"/>
                 </a:solidFill>
@@ -2479,7 +2479,7 @@
         <p:spPr>
           <a:extLst>
             <a:ext uri="{FAA26D3D-D897-4be2-8F04-BA451C77F1D7}">
-              <ma14:placeholderFlag xmlns:ma14="http://schemas.microsoft.com/office/mac/drawingml/2011/main" xmlns="" val="1"/>
+              <ma14:placeholderFlag xmlns="" xmlns:ma14="http://schemas.microsoft.com/office/mac/drawingml/2011/main" val="1"/>
             </a:ext>
           </a:extLst>
         </p:spPr>
@@ -2681,14 +2681,14 @@
           <a:noFill/>
           <a:extLst>
             <a:ext uri="{909E8E84-426E-40dd-AFC4-6F175D3DCCD1}">
-              <a14:hiddenFill xmlns:a14="http://schemas.microsoft.com/office/drawing/2010/main" xmlns="">
+              <a14:hiddenFill xmlns="" xmlns:a14="http://schemas.microsoft.com/office/drawing/2010/main">
                 <a:solidFill>
                   <a:srgbClr val="FFFFFF"/>
                 </a:solidFill>
               </a14:hiddenFill>
             </a:ext>
             <a:ext uri="{91240B29-F687-4f45-9708-019B960494DF}">
-              <a14:hiddenLine xmlns:a14="http://schemas.microsoft.com/office/drawing/2010/main" xmlns="" w="9525">
+              <a14:hiddenLine xmlns="" xmlns:a14="http://schemas.microsoft.com/office/drawing/2010/main" w="9525">
                 <a:solidFill>
                   <a:srgbClr val="000000"/>
                 </a:solidFill>
@@ -2836,14 +2836,14 @@
           <a:noFill/>
           <a:extLst>
             <a:ext uri="{909E8E84-426E-40dd-AFC4-6F175D3DCCD1}">
-              <a14:hiddenFill xmlns:a14="http://schemas.microsoft.com/office/drawing/2010/main" xmlns="">
+              <a14:hiddenFill xmlns="" xmlns:a14="http://schemas.microsoft.com/office/drawing/2010/main">
                 <a:solidFill>
                   <a:srgbClr val="FFFFFF"/>
                 </a:solidFill>
               </a14:hiddenFill>
             </a:ext>
             <a:ext uri="{91240B29-F687-4f45-9708-019B960494DF}">
-              <a14:hiddenLine xmlns:a14="http://schemas.microsoft.com/office/drawing/2010/main" xmlns="" w="9525">
+              <a14:hiddenLine xmlns="" xmlns:a14="http://schemas.microsoft.com/office/drawing/2010/main" w="9525">
                 <a:solidFill>
                   <a:srgbClr val="000000"/>
                 </a:solidFill>
@@ -2991,14 +2991,14 @@
           <a:noFill/>
           <a:extLst>
             <a:ext uri="{909E8E84-426E-40dd-AFC4-6F175D3DCCD1}">
-              <a14:hiddenFill xmlns:a14="http://schemas.microsoft.com/office/drawing/2010/main" xmlns="">
+              <a14:hiddenFill xmlns="" xmlns:a14="http://schemas.microsoft.com/office/drawing/2010/main">
                 <a:solidFill>
                   <a:srgbClr val="FFFFFF"/>
                 </a:solidFill>
               </a14:hiddenFill>
             </a:ext>
             <a:ext uri="{91240B29-F687-4f45-9708-019B960494DF}">
-              <a14:hiddenLine xmlns:a14="http://schemas.microsoft.com/office/drawing/2010/main" xmlns="" w="9525">
+              <a14:hiddenLine xmlns="" xmlns:a14="http://schemas.microsoft.com/office/drawing/2010/main" w="9525">
                 <a:solidFill>
                   <a:srgbClr val="000000"/>
                 </a:solidFill>
@@ -3184,7 +3184,7 @@
           </a:ln>
           <a:extLst>
             <a:ext uri="{FAA26D3D-D897-4be2-8F04-BA451C77F1D7}">
-              <ma14:placeholderFlag xmlns:ma14="http://schemas.microsoft.com/office/mac/drawingml/2011/main" xmlns="" val="1"/>
+              <ma14:placeholderFlag xmlns="" xmlns:ma14="http://schemas.microsoft.com/office/mac/drawingml/2011/main" val="1"/>
             </a:ext>
           </a:extLst>
         </p:spPr>
@@ -3396,7 +3396,7 @@
           <a:p>
             <a:fld id="{C764DE79-268F-4C1A-8933-263129D2AF90}" type="datetimeFigureOut">
               <a:rPr lang="en-US" smtClean="0"/>
-              <a:t>10/6/2025</a:t>
+              <a:t>10/16/25</a:t>
             </a:fld>
             <a:endParaRPr lang="en-US" dirty="0"/>
           </a:p>
@@ -3567,7 +3567,7 @@
           <a:p>
             <a:fld id="{C764DE79-268F-4C1A-8933-263129D2AF90}" type="datetimeFigureOut">
               <a:rPr lang="en-US" smtClean="0"/>
-              <a:t>10/6/2025</a:t>
+              <a:t>10/16/25</a:t>
             </a:fld>
             <a:endParaRPr lang="en-US" dirty="0"/>
           </a:p>
@@ -3748,7 +3748,7 @@
           <a:p>
             <a:fld id="{C764DE79-268F-4C1A-8933-263129D2AF90}" type="datetimeFigureOut">
               <a:rPr lang="en-US" smtClean="0"/>
-              <a:t>10/6/2025</a:t>
+              <a:t>10/16/25</a:t>
             </a:fld>
             <a:endParaRPr lang="en-US" dirty="0"/>
           </a:p>
@@ -4479,7 +4479,7 @@
           <a:p>
             <a:fld id="{C764DE79-268F-4C1A-8933-263129D2AF90}" type="datetimeFigureOut">
               <a:rPr lang="en-US" smtClean="0"/>
-              <a:t>10/6/2025</a:t>
+              <a:t>10/16/25</a:t>
             </a:fld>
             <a:endParaRPr lang="en-US" dirty="0"/>
           </a:p>
@@ -4851,7 +4851,7 @@
           <a:p>
             <a:fld id="{C764DE79-268F-4C1A-8933-263129D2AF90}" type="datetimeFigureOut">
               <a:rPr lang="en-US" smtClean="0"/>
-              <a:t>10/6/2025</a:t>
+              <a:t>10/16/25</a:t>
             </a:fld>
             <a:endParaRPr lang="en-US" dirty="0"/>
           </a:p>
@@ -5151,7 +5151,7 @@
           <a:p>
             <a:fld id="{C764DE79-268F-4C1A-8933-263129D2AF90}" type="datetimeFigureOut">
               <a:rPr lang="en-US" smtClean="0"/>
-              <a:t>10/6/2025</a:t>
+              <a:t>10/16/25</a:t>
             </a:fld>
             <a:endParaRPr lang="en-US" dirty="0"/>
           </a:p>
@@ -5698,7 +5698,7 @@
           <a:p>
             <a:fld id="{C764DE79-268F-4C1A-8933-263129D2AF90}" type="datetimeFigureOut">
               <a:rPr lang="en-US" smtClean="0"/>
-              <a:t>10/6/2025</a:t>
+              <a:t>10/16/25</a:t>
             </a:fld>
             <a:endParaRPr lang="en-US" dirty="0"/>
           </a:p>
@@ -5904,7 +5904,7 @@
           <a:p>
             <a:fld id="{C764DE79-268F-4C1A-8933-263129D2AF90}" type="datetimeFigureOut">
               <a:rPr lang="en-US" smtClean="0"/>
-              <a:t>10/6/2025</a:t>
+              <a:t>10/16/25</a:t>
             </a:fld>
             <a:endParaRPr lang="en-US" dirty="0"/>
           </a:p>
@@ -6116,7 +6116,7 @@
           <a:p>
             <a:fld id="{C764DE79-268F-4C1A-8933-263129D2AF90}" type="datetimeFigureOut">
               <a:rPr lang="en-US" smtClean="0"/>
-              <a:t>10/6/2025</a:t>
+              <a:t>10/16/25</a:t>
             </a:fld>
             <a:endParaRPr lang="en-US" dirty="0"/>
           </a:p>
@@ -6393,7 +6393,7 @@
           <a:p>
             <a:fld id="{C764DE79-268F-4C1A-8933-263129D2AF90}" type="datetimeFigureOut">
               <a:rPr lang="en-US" smtClean="0"/>
-              <a:t>10/6/2025</a:t>
+              <a:t>10/16/25</a:t>
             </a:fld>
             <a:endParaRPr lang="en-US" dirty="0"/>
           </a:p>
@@ -6651,7 +6651,7 @@
           <a:p>
             <a:fld id="{C764DE79-268F-4C1A-8933-263129D2AF90}" type="datetimeFigureOut">
               <a:rPr lang="en-US" smtClean="0"/>
-              <a:t>10/6/2025</a:t>
+              <a:t>10/16/25</a:t>
             </a:fld>
             <a:endParaRPr lang="en-US" dirty="0"/>
           </a:p>
@@ -6870,7 +6870,7 @@
           <a:p>
             <a:fld id="{C764DE79-268F-4C1A-8933-263129D2AF90}" type="datetimeFigureOut">
               <a:rPr lang="en-US" smtClean="0"/>
-              <a:t>10/6/2025</a:t>
+              <a:t>10/16/25</a:t>
             </a:fld>
             <a:endParaRPr lang="en-US" dirty="0"/>
           </a:p>
@@ -7339,14 +7339,14 @@
           </a:ln>
           <a:extLst>
             <a:ext uri="{909E8E84-426E-40dd-AFC4-6F175D3DCCD1}">
-              <a14:hiddenFill xmlns:a14="http://schemas.microsoft.com/office/drawing/2010/main" xmlns="">
+              <a14:hiddenFill xmlns="" xmlns:a14="http://schemas.microsoft.com/office/drawing/2010/main">
                 <a:solidFill>
                   <a:srgbClr val="FFFFFF"/>
                 </a:solidFill>
               </a14:hiddenFill>
             </a:ext>
             <a:ext uri="{91240B29-F687-4f45-9708-019B960494DF}">
-              <a14:hiddenLine xmlns:a14="http://schemas.microsoft.com/office/drawing/2010/main" xmlns="" w="9525">
+              <a14:hiddenLine xmlns="" xmlns:a14="http://schemas.microsoft.com/office/drawing/2010/main" w="9525">
                 <a:solidFill>
                   <a:srgbClr val="000000"/>
                 </a:solidFill>
@@ -7776,42 +7776,6 @@
           </a:p>
         </p:txBody>
       </p:sp>
-      <p:pic>
-        <p:nvPicPr>
-          <p:cNvPr id="4" name="Picture 3" descr="Text&#10;&#10;Description automatically generated">
-            <a:extLst>
-              <a:ext uri="{FF2B5EF4-FFF2-40B4-BE49-F238E27FC236}">
-                <a16:creationId xmlns:a16="http://schemas.microsoft.com/office/drawing/2014/main" id="{3C52B6A4-97C1-5BF3-8F44-19C73FB40166}"/>
-              </a:ext>
-            </a:extLst>
-          </p:cNvPr>
-          <p:cNvPicPr>
-            <a:picLocks noChangeAspect="1"/>
-          </p:cNvPicPr>
-          <p:nvPr/>
-        </p:nvPicPr>
-        <p:blipFill>
-          <a:blip r:embed="rId3" cstate="print">
-            <a:extLst>
-              <a:ext uri="{28A0092B-C50C-407E-A947-70E740481C1C}">
-                <a14:useLocalDpi xmlns:a14="http://schemas.microsoft.com/office/drawing/2010/main" val="0"/>
-              </a:ext>
-            </a:extLst>
-          </a:blip>
-          <a:stretch>
-            <a:fillRect/>
-          </a:stretch>
-        </p:blipFill>
-        <p:spPr>
-          <a:xfrm>
-            <a:off x="651641" y="5501441"/>
-            <a:ext cx="2286000" cy="1281546"/>
-          </a:xfrm>
-          <a:prstGeom prst="rect">
-            <a:avLst/>
-          </a:prstGeom>
-        </p:spPr>
-      </p:pic>
       <p:sp>
         <p:nvSpPr>
           <p:cNvPr id="5" name="TextBox 4">
@@ -7882,7 +7846,7 @@
           <p:nvPr/>
         </p:nvPicPr>
         <p:blipFill>
-          <a:blip r:embed="rId4">
+          <a:blip r:embed="rId3">
             <a:extLst>
               <a:ext uri="{28A0092B-C50C-407E-A947-70E740481C1C}">
                 <a14:useLocalDpi xmlns:a14="http://schemas.microsoft.com/office/drawing/2010/main" val="0"/>
@@ -7912,6 +7876,42 @@
               </a14:hiddenFill>
             </a:ext>
           </a:extLst>
+        </p:spPr>
+      </p:pic>
+      <p:pic>
+        <p:nvPicPr>
+          <p:cNvPr id="7" name="Picture 6">
+            <a:extLst>
+              <a:ext uri="{FF2B5EF4-FFF2-40B4-BE49-F238E27FC236}">
+                <a16:creationId xmlns:a16="http://schemas.microsoft.com/office/drawing/2014/main" id="{005E705B-6853-4F4B-F4C8-4BC06BAFF1DE}"/>
+              </a:ext>
+            </a:extLst>
+          </p:cNvPr>
+          <p:cNvPicPr>
+            <a:picLocks noChangeAspect="1"/>
+          </p:cNvPicPr>
+          <p:nvPr/>
+        </p:nvPicPr>
+        <p:blipFill>
+          <a:blip r:embed="rId4" cstate="print">
+            <a:extLst>
+              <a:ext uri="{28A0092B-C50C-407E-A947-70E740481C1C}">
+                <a14:useLocalDpi xmlns:a14="http://schemas.microsoft.com/office/drawing/2010/main" val="0"/>
+              </a:ext>
+            </a:extLst>
+          </a:blip>
+          <a:stretch>
+            <a:fillRect/>
+          </a:stretch>
+        </p:blipFill>
+        <p:spPr>
+          <a:xfrm>
+            <a:off x="499242" y="5565517"/>
+            <a:ext cx="2057400" cy="1153391"/>
+          </a:xfrm>
+          <a:prstGeom prst="rect">
+            <a:avLst/>
+          </a:prstGeom>
         </p:spPr>
       </p:pic>
     </p:spTree>
@@ -9709,14 +9709,14 @@
           </a:ln>
           <a:extLst>
             <a:ext uri="{909E8E84-426E-40dd-AFC4-6F175D3DCCD1}">
-              <a14:hiddenFill xmlns:a14="http://schemas.microsoft.com/office/drawing/2010/main" xmlns="">
+              <a14:hiddenFill xmlns="" xmlns:a14="http://schemas.microsoft.com/office/drawing/2010/main">
                 <a:solidFill>
                   <a:srgbClr val="FFFFFF"/>
                 </a:solidFill>
               </a14:hiddenFill>
             </a:ext>
             <a:ext uri="{91240B29-F687-4f45-9708-019B960494DF}">
-              <a14:hiddenLine xmlns:a14="http://schemas.microsoft.com/office/drawing/2010/main" xmlns="" w="9525">
+              <a14:hiddenLine xmlns="" xmlns:a14="http://schemas.microsoft.com/office/drawing/2010/main" w="9525">
                 <a:solidFill>
                   <a:srgbClr val="000000"/>
                 </a:solidFill>
@@ -10541,14 +10541,14 @@
           </a:ln>
           <a:extLst>
             <a:ext uri="{909E8E84-426E-40dd-AFC4-6F175D3DCCD1}">
-              <a14:hiddenFill xmlns:a14="http://schemas.microsoft.com/office/drawing/2010/main" xmlns="">
+              <a14:hiddenFill xmlns="" xmlns:a14="http://schemas.microsoft.com/office/drawing/2010/main">
                 <a:solidFill>
                   <a:srgbClr val="FFFFFF"/>
                 </a:solidFill>
               </a14:hiddenFill>
             </a:ext>
             <a:ext uri="{91240B29-F687-4f45-9708-019B960494DF}">
-              <a14:hiddenLine xmlns:a14="http://schemas.microsoft.com/office/drawing/2010/main" xmlns="" w="9525">
+              <a14:hiddenLine xmlns="" xmlns:a14="http://schemas.microsoft.com/office/drawing/2010/main" w="9525">
                 <a:solidFill>
                   <a:srgbClr val="000000"/>
                 </a:solidFill>
@@ -10969,14 +10969,14 @@
           </a:ln>
           <a:extLst>
             <a:ext uri="{909E8E84-426E-40dd-AFC4-6F175D3DCCD1}">
-              <a14:hiddenFill xmlns:a14="http://schemas.microsoft.com/office/drawing/2010/main" xmlns="">
+              <a14:hiddenFill xmlns="" xmlns:a14="http://schemas.microsoft.com/office/drawing/2010/main">
                 <a:solidFill>
                   <a:srgbClr val="FFFFFF"/>
                 </a:solidFill>
               </a14:hiddenFill>
             </a:ext>
             <a:ext uri="{91240B29-F687-4f45-9708-019B960494DF}">
-              <a14:hiddenLine xmlns:a14="http://schemas.microsoft.com/office/drawing/2010/main" xmlns="" w="9525">
+              <a14:hiddenLine xmlns="" xmlns:a14="http://schemas.microsoft.com/office/drawing/2010/main" w="9525">
                 <a:solidFill>
                   <a:srgbClr val="000000"/>
                 </a:solidFill>
@@ -11334,14 +11334,14 @@
           </a:ln>
           <a:extLst>
             <a:ext uri="{909E8E84-426E-40dd-AFC4-6F175D3DCCD1}">
-              <a14:hiddenFill xmlns:a14="http://schemas.microsoft.com/office/drawing/2010/main" xmlns="">
+              <a14:hiddenFill xmlns="" xmlns:a14="http://schemas.microsoft.com/office/drawing/2010/main">
                 <a:solidFill>
                   <a:srgbClr val="FFFFFF"/>
                 </a:solidFill>
               </a14:hiddenFill>
             </a:ext>
             <a:ext uri="{91240B29-F687-4f45-9708-019B960494DF}">
-              <a14:hiddenLine xmlns:a14="http://schemas.microsoft.com/office/drawing/2010/main" xmlns="" w="9525">
+              <a14:hiddenLine xmlns="" xmlns:a14="http://schemas.microsoft.com/office/drawing/2010/main" w="9525">
                 <a:solidFill>
                   <a:srgbClr val="000000"/>
                 </a:solidFill>
@@ -11582,7 +11582,7 @@
           </a:ln>
           <a:extLst>
             <a:ext uri="{909E8E84-426E-40dd-AFC4-6F175D3DCCD1}">
-              <a14:hiddenFill xmlns:a14="http://schemas.microsoft.com/office/drawing/2010/main" xmlns="">
+              <a14:hiddenFill xmlns="" xmlns:a14="http://schemas.microsoft.com/office/drawing/2010/main">
                 <a:noFill/>
               </a14:hiddenFill>
             </a:ext>
